--- a/Presentation.pptx
+++ b/Presentation.pptx
@@ -7797,7 +7797,15 @@
           <a:p>
             <a:r>
               <a:rPr lang="en-GB" sz="2400" b="0" dirty="0"/>
-              <a:t>The aim is not be complete.</a:t>
+              <a:t>The aim is </a:t>
+            </a:r>
+            <a:r>
+              <a:rPr lang="en-GB" sz="2400" b="0"/>
+              <a:t>not to be </a:t>
+            </a:r>
+            <a:r>
+              <a:rPr lang="en-GB" sz="2400" b="0" dirty="0"/>
+              <a:t>complete.</a:t>
             </a:r>
             <a:endParaRPr lang="en-GB" sz="2400" b="0" noProof="0" dirty="0"/>
           </a:p>

--- a/Presentation.pptx
+++ b/Presentation.pptx
@@ -6125,7 +6125,7 @@
           <a:p>
             <a:r>
               <a:rPr lang="en-GB" sz="2400" b="0" noProof="0" dirty="0"/>
-              <a:t>You can see it detects the lampposts</a:t>
+              <a:t>You can see it detects the lampposts, with restrictions:</a:t>
             </a:r>
           </a:p>
           <a:p>
@@ -6169,7 +6169,15 @@
             <a:pPr lvl="1"/>
             <a:r>
               <a:rPr lang="en-GB" sz="2000" b="0" noProof="0" dirty="0"/>
-              <a:t>The image must be exposed so that the light is close to maximum brightness</a:t>
+              <a:t>The image must be exposed so that the </a:t>
+            </a:r>
+            <a:r>
+              <a:rPr lang="en-GB" sz="2000" b="0" dirty="0"/>
+              <a:t>glow</a:t>
+            </a:r>
+            <a:r>
+              <a:rPr lang="en-GB" sz="2000" b="0" noProof="0" dirty="0"/>
+              <a:t> is close to maximum brightness</a:t>
             </a:r>
           </a:p>
           <a:p>
@@ -6439,7 +6447,7 @@
           <a:p>
             <a:r>
               <a:rPr lang="en-GB" sz="2400" b="0" dirty="0"/>
-              <a:t>The output layer activates in areas were both C and D are activated.</a:t>
+              <a:t>The output layer O activates in areas where both C and D are activated.</a:t>
             </a:r>
           </a:p>
           <a:p>
@@ -8665,7 +8673,7 @@
           <a:p>
             <a:r>
               <a:rPr lang="en-GB" sz="2400" b="0" dirty="0"/>
-              <a:t>Each pixel value in an output layer is a function of its neighbours its input layer.</a:t>
+              <a:t>Each pixel value in an output layer is a function of its neighbours in its input layer.</a:t>
             </a:r>
           </a:p>
           <a:p>
@@ -8690,7 +8698,7 @@
             </a:r>
             <a:r>
               <a:rPr lang="en-GB" sz="2400" b="0" dirty="0"/>
-              <a:t> during the training process. Though they can be chosen manually</a:t>
+              <a:t> during the training process. Though they can be chosen manually.</a:t>
             </a:r>
           </a:p>
         </p:txBody>
@@ -8962,13 +8970,10 @@
           <a:p>
             <a:r>
               <a:rPr lang="en-GB" sz="2400" b="0" dirty="0"/>
-              <a:t>This kernel is setup to detect horizontal edge from dark to bright.</a:t>
-            </a:r>
-          </a:p>
-          <a:p>
-            <a:pPr marL="0" indent="0">
-              <a:buNone/>
-            </a:pPr>
+              <a:t>This kernel is setup to detect horizontal edges.</a:t>
+            </a:r>
+          </a:p>
+          <a:p>
             <a:endParaRPr lang="en-GB" sz="2400" b="0" dirty="0"/>
           </a:p>
           <a:p>
@@ -9036,7 +9041,7 @@
             </a:r>
             <a:r>
               <a:rPr lang="en-GB" sz="2400" b="0" dirty="0"/>
-              <a:t>is added, it is also learned. Here it is 0.</a:t>
+              <a:t>is added. It is learned as well. Here it is 0.</a:t>
             </a:r>
           </a:p>
           <a:p>
@@ -10072,7 +10077,7 @@
             <a:pPr lvl="1"/>
             <a:r>
               <a:rPr lang="en-GB" sz="2000" b="0" noProof="0" dirty="0"/>
-              <a:t>Let us try to detect an edge with opposite direction.</a:t>
+              <a:t>Let us try to detect an edge with the opposite direction.</a:t>
             </a:r>
           </a:p>
           <a:p>
@@ -10317,7 +10322,7 @@
             <a:pPr lvl="1"/>
             <a:r>
               <a:rPr lang="en-GB" sz="2000" b="0" noProof="0" dirty="0"/>
-              <a:t>Let us try to detect bright vertical lines on a darker background</a:t>
+              <a:t>Let us try to detect bright vertical lines on a darker background.</a:t>
             </a:r>
           </a:p>
           <a:p>
@@ -10356,7 +10361,7 @@
             <a:pPr lvl="1"/>
             <a:r>
               <a:rPr lang="en-GB" sz="2000" b="0" noProof="0" dirty="0"/>
-              <a:t>Try to make the kernels average be close to zero</a:t>
+              <a:t>Try to make the kernel´s average be close to zero</a:t>
             </a:r>
           </a:p>
         </p:txBody>
